--- a/src/navio-internship.pptx
+++ b/src/navio-internship.pptx
@@ -143,7 +143,7 @@
     </p:spTree>
     <p:extLst>
       <p:ext uri="{BB962C8B-B14F-4D97-AF65-F5344CB8AC3E}">
-        <p14:creationId xmlns:p14="http://schemas.microsoft.com/office/powerpoint/2010/main" val="3215044529"/>
+        <p14:creationId xmlns:p14="http://schemas.microsoft.com/office/powerpoint/2010/main" val="2371848012"/>
       </p:ext>
     </p:extLst>
   </p:cSld>
@@ -1170,44 +1170,14 @@
       </p:grpSpPr>
       <p:sp>
         <p:nvSpPr>
-          <p:cNvPr id="2" name="Text 0"/>
-          <p:cNvSpPr/>
-          <p:nvPr/>
-        </p:nvSpPr>
-        <p:spPr>
-          <a:xfrm>
-            <a:off x="4552950" y="1162050"/>
-            <a:ext cx="38100" cy="952500"/>
-          </a:xfrm>
-          <a:prstGeom prst="rect">
-            <a:avLst/>
-          </a:prstGeom>
-          <a:solidFill>
-            <a:srgbClr val="F97316"/>
-          </a:solidFill>
-          <a:ln/>
-        </p:spPr>
-        <p:txBody>
-          <a:bodyPr wrap="square" rtlCol="0" anchor="ctr"/>
-          <a:lstStyle/>
-          <a:p>
-            <a:pPr marL="0" indent="0">
-              <a:buNone/>
-            </a:pPr>
-            <a:endParaRPr lang="en-US" dirty="0"/>
-          </a:p>
-        </p:txBody>
-      </p:sp>
-      <p:sp>
-        <p:nvSpPr>
           <p:cNvPr id="3" name="Text 1"/>
           <p:cNvSpPr/>
           <p:nvPr/>
         </p:nvSpPr>
         <p:spPr>
           <a:xfrm>
-            <a:off x="1972043" y="2457450"/>
-            <a:ext cx="5199766" cy="533400"/>
+            <a:off x="1972117" y="2370780"/>
+            <a:ext cx="5199766" cy="466620"/>
           </a:xfrm>
           <a:prstGeom prst="rect">
             <a:avLst/>
@@ -1334,6 +1304,36 @@
           </a:p>
         </p:txBody>
       </p:sp>
+      <p:pic>
+        <p:nvPicPr>
+          <p:cNvPr id="6" name="Рисунок 5">
+            <a:extLst>
+              <a:ext uri="{FF2B5EF4-FFF2-40B4-BE49-F238E27FC236}">
+                <a16:creationId xmlns:a16="http://schemas.microsoft.com/office/drawing/2014/main" id="{E4A6945E-8894-92D2-DC70-1FCAA7AC80E0}"/>
+              </a:ext>
+            </a:extLst>
+          </p:cNvPr>
+          <p:cNvPicPr>
+            <a:picLocks noChangeAspect="1"/>
+          </p:cNvPicPr>
+          <p:nvPr/>
+        </p:nvPicPr>
+        <p:blipFill>
+          <a:blip r:embed="rId3"/>
+          <a:stretch>
+            <a:fillRect/>
+          </a:stretch>
+        </p:blipFill>
+        <p:spPr>
+          <a:xfrm>
+            <a:off x="1135418" y="633047"/>
+            <a:ext cx="6873164" cy="1718291"/>
+          </a:xfrm>
+          <a:prstGeom prst="rect">
+            <a:avLst/>
+          </a:prstGeom>
+        </p:spPr>
+      </p:pic>
     </p:spTree>
   </p:cSld>
   <p:clrMapOvr>
@@ -1725,7 +1725,7 @@
       </p:sp>
       <p:pic>
         <p:nvPicPr>
-          <p:cNvPr id="12" name="Image 0" descr="/tmp/rasterized-gradient-78b5bb7a.png"/>
+          <p:cNvPr id="12" name="Image 0" descr="/tmp/rasterized-gradient-3c546da5.png"/>
           <p:cNvPicPr>
             <a:picLocks noChangeAspect="1"/>
           </p:cNvPicPr>
@@ -4867,7 +4867,7 @@
       </p:sp>
       <p:pic>
         <p:nvPicPr>
-          <p:cNvPr id="4" name="Image 0" descr="/tmp/rasterized-gradient-33472e9a.png"/>
+          <p:cNvPr id="4" name="Image 0" descr="/tmp/rasterized-gradient-b1136fea.png"/>
           <p:cNvPicPr>
             <a:picLocks noChangeAspect="1"/>
           </p:cNvPicPr>
@@ -5690,7 +5690,7 @@
         </p:nvSpPr>
         <p:spPr>
           <a:xfrm>
-            <a:off x="190500" y="221010"/>
+            <a:off x="190500" y="303163"/>
             <a:ext cx="38100" cy="381000"/>
           </a:xfrm>
           <a:prstGeom prst="rect">
@@ -5720,7 +5720,7 @@
         </p:nvSpPr>
         <p:spPr>
           <a:xfrm>
-            <a:off x="342900" y="259110"/>
+            <a:off x="342900" y="341263"/>
             <a:ext cx="4349052" cy="304800"/>
           </a:xfrm>
           <a:prstGeom prst="rect">
@@ -5762,12 +5762,12 @@
         </p:nvSpPr>
         <p:spPr>
           <a:xfrm>
-            <a:off x="381000" y="925860"/>
-            <a:ext cx="4095750" cy="4196655"/>
+            <a:off x="381000" y="1008013"/>
+            <a:ext cx="4095750" cy="4032200"/>
           </a:xfrm>
           <a:prstGeom prst="roundRect">
             <a:avLst>
-              <a:gd name="adj" fmla="val 930"/>
+              <a:gd name="adj" fmla="val 945"/>
             </a:avLst>
           </a:prstGeom>
           <a:solidFill>
@@ -5794,8 +5794,8 @@
         </p:nvSpPr>
         <p:spPr>
           <a:xfrm>
-            <a:off x="571500" y="1116360"/>
-            <a:ext cx="1904238" cy="190500"/>
+            <a:off x="552450" y="1179463"/>
+            <a:ext cx="1923669" cy="190500"/>
           </a:xfrm>
           <a:prstGeom prst="rect">
             <a:avLst/>
@@ -5812,7 +5812,7 @@
                 <a:spcPts val="1500"/>
               </a:lnSpc>
               <a:spcAft>
-                <a:spcPts val="1050"/>
+                <a:spcPts val="900"/>
               </a:spcAft>
               <a:buNone/>
             </a:pPr>
@@ -5839,8 +5839,55 @@
         </p:nvSpPr>
         <p:spPr>
           <a:xfrm>
-            <a:off x="571500" y="1621185"/>
-            <a:ext cx="3714750" cy="57150"/>
+            <a:off x="552450" y="1484263"/>
+            <a:ext cx="3827907" cy="173236"/>
+          </a:xfrm>
+          <a:prstGeom prst="rect">
+            <a:avLst/>
+          </a:prstGeom>
+          <a:noFill/>
+          <a:ln/>
+        </p:spPr>
+        <p:txBody>
+          <a:bodyPr wrap="square" lIns="0" tIns="0" rIns="0" bIns="0" rtlCol="0" anchor="t"/>
+          <a:lstStyle/>
+          <a:p>
+            <a:pPr marL="0" indent="0" algn="l">
+              <a:lnSpc>
+                <a:spcPts val="1365"/>
+              </a:lnSpc>
+              <a:spcAft>
+                <a:spcPts val="225"/>
+              </a:spcAft>
+              <a:buNone/>
+            </a:pPr>
+            <a:r>
+              <a:rPr lang="en-US" sz="975" dirty="0">
+                <a:solidFill>
+                  <a:srgbClr val="FFFFFF">
+                    <a:alpha val="90000"/>
+                  </a:srgbClr>
+                </a:solidFill>
+                <a:latin typeface="Arial" pitchFamily="34" charset="0"/>
+                <a:ea typeface="Arial" pitchFamily="34" charset="-122"/>
+                <a:cs typeface="Arial" pitchFamily="34" charset="-120"/>
+              </a:rPr>
+              <a:t>Python для тестирования</a:t>
+            </a:r>
+            <a:endParaRPr lang="en-US" sz="975" dirty="0"/>
+          </a:p>
+        </p:txBody>
+      </p:sp>
+      <p:sp>
+        <p:nvSpPr>
+          <p:cNvPr id="7" name="Text 5"/>
+          <p:cNvSpPr/>
+          <p:nvPr/>
+        </p:nvSpPr>
+        <p:spPr>
+          <a:xfrm>
+            <a:off x="552450" y="1686074"/>
+            <a:ext cx="3752850" cy="57150"/>
           </a:xfrm>
           <a:prstGeom prst="roundRect">
             <a:avLst>
@@ -5867,14 +5914,14 @@
       </p:sp>
       <p:sp>
         <p:nvSpPr>
-          <p:cNvPr id="7" name="Text 5"/>
-          <p:cNvSpPr/>
-          <p:nvPr/>
-        </p:nvSpPr>
-        <p:spPr>
-          <a:xfrm>
-            <a:off x="571500" y="1621185"/>
-            <a:ext cx="3157538" cy="57150"/>
+          <p:cNvPr id="8" name="Text 6"/>
+          <p:cNvSpPr/>
+          <p:nvPr/>
+        </p:nvSpPr>
+        <p:spPr>
+          <a:xfrm>
+            <a:off x="552450" y="1686074"/>
+            <a:ext cx="3189833" cy="57150"/>
           </a:xfrm>
           <a:prstGeom prst="rect">
             <a:avLst/>
@@ -5897,14 +5944,61 @@
       </p:sp>
       <p:sp>
         <p:nvSpPr>
-          <p:cNvPr id="8" name="Text 6"/>
-          <p:cNvSpPr/>
-          <p:nvPr/>
-        </p:nvSpPr>
-        <p:spPr>
-          <a:xfrm>
-            <a:off x="571500" y="1954560"/>
-            <a:ext cx="3714750" cy="57150"/>
+          <p:cNvPr id="9" name="Text 7"/>
+          <p:cNvSpPr/>
+          <p:nvPr/>
+        </p:nvSpPr>
+        <p:spPr>
+          <a:xfrm>
+            <a:off x="552450" y="1828949"/>
+            <a:ext cx="3827907" cy="173236"/>
+          </a:xfrm>
+          <a:prstGeom prst="rect">
+            <a:avLst/>
+          </a:prstGeom>
+          <a:noFill/>
+          <a:ln/>
+        </p:spPr>
+        <p:txBody>
+          <a:bodyPr wrap="square" lIns="0" tIns="0" rIns="0" bIns="0" rtlCol="0" anchor="t"/>
+          <a:lstStyle/>
+          <a:p>
+            <a:pPr marL="0" indent="0" algn="l">
+              <a:lnSpc>
+                <a:spcPts val="1365"/>
+              </a:lnSpc>
+              <a:spcAft>
+                <a:spcPts val="225"/>
+              </a:spcAft>
+              <a:buNone/>
+            </a:pPr>
+            <a:r>
+              <a:rPr lang="en-US" sz="975" dirty="0">
+                <a:solidFill>
+                  <a:srgbClr val="FFFFFF">
+                    <a:alpha val="90000"/>
+                  </a:srgbClr>
+                </a:solidFill>
+                <a:latin typeface="Arial" pitchFamily="34" charset="0"/>
+                <a:ea typeface="Arial" pitchFamily="34" charset="-122"/>
+                <a:cs typeface="Arial" pitchFamily="34" charset="-120"/>
+              </a:rPr>
+              <a:t>pytest Framework</a:t>
+            </a:r>
+            <a:endParaRPr lang="en-US" sz="975" dirty="0"/>
+          </a:p>
+        </p:txBody>
+      </p:sp>
+      <p:sp>
+        <p:nvSpPr>
+          <p:cNvPr id="10" name="Text 8"/>
+          <p:cNvSpPr/>
+          <p:nvPr/>
+        </p:nvSpPr>
+        <p:spPr>
+          <a:xfrm>
+            <a:off x="552450" y="2030760"/>
+            <a:ext cx="3752850" cy="57150"/>
           </a:xfrm>
           <a:prstGeom prst="roundRect">
             <a:avLst>
@@ -5931,14 +6025,14 @@
       </p:sp>
       <p:sp>
         <p:nvSpPr>
-          <p:cNvPr id="9" name="Text 7"/>
-          <p:cNvSpPr/>
-          <p:nvPr/>
-        </p:nvSpPr>
-        <p:spPr>
-          <a:xfrm>
-            <a:off x="571500" y="1954560"/>
-            <a:ext cx="2971800" cy="57150"/>
+          <p:cNvPr id="11" name="Text 9"/>
+          <p:cNvSpPr/>
+          <p:nvPr/>
+        </p:nvSpPr>
+        <p:spPr>
+          <a:xfrm>
+            <a:off x="552450" y="2030760"/>
+            <a:ext cx="3002161" cy="57150"/>
           </a:xfrm>
           <a:prstGeom prst="rect">
             <a:avLst/>
@@ -5961,14 +6055,61 @@
       </p:sp>
       <p:sp>
         <p:nvSpPr>
-          <p:cNvPr id="10" name="Text 8"/>
-          <p:cNvSpPr/>
-          <p:nvPr/>
-        </p:nvSpPr>
-        <p:spPr>
-          <a:xfrm>
-            <a:off x="571500" y="2287935"/>
-            <a:ext cx="3714750" cy="57150"/>
+          <p:cNvPr id="12" name="Text 10"/>
+          <p:cNvSpPr/>
+          <p:nvPr/>
+        </p:nvSpPr>
+        <p:spPr>
+          <a:xfrm>
+            <a:off x="552450" y="2173635"/>
+            <a:ext cx="3827907" cy="173236"/>
+          </a:xfrm>
+          <a:prstGeom prst="rect">
+            <a:avLst/>
+          </a:prstGeom>
+          <a:noFill/>
+          <a:ln/>
+        </p:spPr>
+        <p:txBody>
+          <a:bodyPr wrap="square" lIns="0" tIns="0" rIns="0" bIns="0" rtlCol="0" anchor="t"/>
+          <a:lstStyle/>
+          <a:p>
+            <a:pPr marL="0" indent="0" algn="l">
+              <a:lnSpc>
+                <a:spcPts val="1365"/>
+              </a:lnSpc>
+              <a:spcAft>
+                <a:spcPts val="225"/>
+              </a:spcAft>
+              <a:buNone/>
+            </a:pPr>
+            <a:r>
+              <a:rPr lang="en-US" sz="975" dirty="0">
+                <a:solidFill>
+                  <a:srgbClr val="FFFFFF">
+                    <a:alpha val="90000"/>
+                  </a:srgbClr>
+                </a:solidFill>
+                <a:latin typeface="Arial" pitchFamily="34" charset="0"/>
+                <a:ea typeface="Arial" pitchFamily="34" charset="-122"/>
+                <a:cs typeface="Arial" pitchFamily="34" charset="-120"/>
+              </a:rPr>
+              <a:t>HIL-тестирование</a:t>
+            </a:r>
+            <a:endParaRPr lang="en-US" sz="975" dirty="0"/>
+          </a:p>
+        </p:txBody>
+      </p:sp>
+      <p:sp>
+        <p:nvSpPr>
+          <p:cNvPr id="13" name="Text 11"/>
+          <p:cNvSpPr/>
+          <p:nvPr/>
+        </p:nvSpPr>
+        <p:spPr>
+          <a:xfrm>
+            <a:off x="552450" y="2375446"/>
+            <a:ext cx="3752850" cy="57150"/>
           </a:xfrm>
           <a:prstGeom prst="roundRect">
             <a:avLst>
@@ -5995,14 +6136,14 @@
       </p:sp>
       <p:sp>
         <p:nvSpPr>
-          <p:cNvPr id="11" name="Text 9"/>
-          <p:cNvSpPr/>
-          <p:nvPr/>
-        </p:nvSpPr>
-        <p:spPr>
-          <a:xfrm>
-            <a:off x="571500" y="2287935"/>
-            <a:ext cx="2600325" cy="57150"/>
+          <p:cNvPr id="14" name="Text 12"/>
+          <p:cNvSpPr/>
+          <p:nvPr/>
+        </p:nvSpPr>
+        <p:spPr>
+          <a:xfrm>
+            <a:off x="552450" y="2375446"/>
+            <a:ext cx="2626965" cy="57150"/>
           </a:xfrm>
           <a:prstGeom prst="rect">
             <a:avLst/>
@@ -6025,14 +6166,61 @@
       </p:sp>
       <p:sp>
         <p:nvSpPr>
-          <p:cNvPr id="12" name="Text 10"/>
-          <p:cNvSpPr/>
-          <p:nvPr/>
-        </p:nvSpPr>
-        <p:spPr>
-          <a:xfrm>
-            <a:off x="571500" y="2621310"/>
-            <a:ext cx="3714750" cy="57150"/>
+          <p:cNvPr id="15" name="Text 13"/>
+          <p:cNvSpPr/>
+          <p:nvPr/>
+        </p:nvSpPr>
+        <p:spPr>
+          <a:xfrm>
+            <a:off x="552450" y="2518321"/>
+            <a:ext cx="3827907" cy="173236"/>
+          </a:xfrm>
+          <a:prstGeom prst="rect">
+            <a:avLst/>
+          </a:prstGeom>
+          <a:noFill/>
+          <a:ln/>
+        </p:spPr>
+        <p:txBody>
+          <a:bodyPr wrap="square" lIns="0" tIns="0" rIns="0" bIns="0" rtlCol="0" anchor="t"/>
+          <a:lstStyle/>
+          <a:p>
+            <a:pPr marL="0" indent="0" algn="l">
+              <a:lnSpc>
+                <a:spcPts val="1365"/>
+              </a:lnSpc>
+              <a:spcAft>
+                <a:spcPts val="225"/>
+              </a:spcAft>
+              <a:buNone/>
+            </a:pPr>
+            <a:r>
+              <a:rPr lang="en-US" sz="975" dirty="0">
+                <a:solidFill>
+                  <a:srgbClr val="FFFFFF">
+                    <a:alpha val="90000"/>
+                  </a:srgbClr>
+                </a:solidFill>
+                <a:latin typeface="Arial" pitchFamily="34" charset="0"/>
+                <a:ea typeface="Arial" pitchFamily="34" charset="-122"/>
+                <a:cs typeface="Arial" pitchFamily="34" charset="-120"/>
+              </a:rPr>
+              <a:t>CARLA Simulator</a:t>
+            </a:r>
+            <a:endParaRPr lang="en-US" sz="975" dirty="0"/>
+          </a:p>
+        </p:txBody>
+      </p:sp>
+      <p:sp>
+        <p:nvSpPr>
+          <p:cNvPr id="16" name="Text 14"/>
+          <p:cNvSpPr/>
+          <p:nvPr/>
+        </p:nvSpPr>
+        <p:spPr>
+          <a:xfrm>
+            <a:off x="552450" y="2720132"/>
+            <a:ext cx="3752850" cy="57150"/>
           </a:xfrm>
           <a:prstGeom prst="roundRect">
             <a:avLst>
@@ -6059,14 +6247,14 @@
       </p:sp>
       <p:sp>
         <p:nvSpPr>
-          <p:cNvPr id="13" name="Text 11"/>
-          <p:cNvSpPr/>
-          <p:nvPr/>
-        </p:nvSpPr>
-        <p:spPr>
-          <a:xfrm>
-            <a:off x="571500" y="2621310"/>
-            <a:ext cx="2414588" cy="57150"/>
+          <p:cNvPr id="17" name="Text 15"/>
+          <p:cNvSpPr/>
+          <p:nvPr/>
+        </p:nvSpPr>
+        <p:spPr>
+          <a:xfrm>
+            <a:off x="552450" y="2720132"/>
+            <a:ext cx="2439293" cy="57150"/>
           </a:xfrm>
           <a:prstGeom prst="rect">
             <a:avLst/>
@@ -6089,14 +6277,61 @@
       </p:sp>
       <p:sp>
         <p:nvSpPr>
-          <p:cNvPr id="14" name="Text 12"/>
-          <p:cNvSpPr/>
-          <p:nvPr/>
-        </p:nvSpPr>
-        <p:spPr>
-          <a:xfrm>
-            <a:off x="571500" y="2954685"/>
-            <a:ext cx="3714750" cy="57150"/>
+          <p:cNvPr id="18" name="Text 16"/>
+          <p:cNvSpPr/>
+          <p:nvPr/>
+        </p:nvSpPr>
+        <p:spPr>
+          <a:xfrm>
+            <a:off x="552450" y="2863007"/>
+            <a:ext cx="3827907" cy="173236"/>
+          </a:xfrm>
+          <a:prstGeom prst="rect">
+            <a:avLst/>
+          </a:prstGeom>
+          <a:noFill/>
+          <a:ln/>
+        </p:spPr>
+        <p:txBody>
+          <a:bodyPr wrap="square" lIns="0" tIns="0" rIns="0" bIns="0" rtlCol="0" anchor="t"/>
+          <a:lstStyle/>
+          <a:p>
+            <a:pPr marL="0" indent="0" algn="l">
+              <a:lnSpc>
+                <a:spcPts val="1365"/>
+              </a:lnSpc>
+              <a:spcAft>
+                <a:spcPts val="225"/>
+              </a:spcAft>
+              <a:buNone/>
+            </a:pPr>
+            <a:r>
+              <a:rPr lang="en-US" sz="975" dirty="0">
+                <a:solidFill>
+                  <a:srgbClr val="FFFFFF">
+                    <a:alpha val="90000"/>
+                  </a:srgbClr>
+                </a:solidFill>
+                <a:latin typeface="Arial" pitchFamily="34" charset="0"/>
+                <a:ea typeface="Arial" pitchFamily="34" charset="-122"/>
+                <a:cs typeface="Arial" pitchFamily="34" charset="-120"/>
+              </a:rPr>
+              <a:t>Git &amp; CI/CD</a:t>
+            </a:r>
+            <a:endParaRPr lang="en-US" sz="975" dirty="0"/>
+          </a:p>
+        </p:txBody>
+      </p:sp>
+      <p:sp>
+        <p:nvSpPr>
+          <p:cNvPr id="19" name="Text 17"/>
+          <p:cNvSpPr/>
+          <p:nvPr/>
+        </p:nvSpPr>
+        <p:spPr>
+          <a:xfrm>
+            <a:off x="552450" y="3064818"/>
+            <a:ext cx="3752850" cy="57150"/>
           </a:xfrm>
           <a:prstGeom prst="roundRect">
             <a:avLst>
@@ -6123,14 +6358,14 @@
       </p:sp>
       <p:sp>
         <p:nvSpPr>
-          <p:cNvPr id="15" name="Text 13"/>
-          <p:cNvSpPr/>
-          <p:nvPr/>
-        </p:nvSpPr>
-        <p:spPr>
-          <a:xfrm>
-            <a:off x="571500" y="2954685"/>
-            <a:ext cx="2786063" cy="57150"/>
+          <p:cNvPr id="20" name="Text 18"/>
+          <p:cNvSpPr/>
+          <p:nvPr/>
+        </p:nvSpPr>
+        <p:spPr>
+          <a:xfrm>
+            <a:off x="552450" y="3064818"/>
+            <a:ext cx="2814638" cy="57150"/>
           </a:xfrm>
           <a:prstGeom prst="rect">
             <a:avLst/>
@@ -6153,18 +6388,18 @@
       </p:sp>
       <p:sp>
         <p:nvSpPr>
-          <p:cNvPr id="16" name="Text 14"/>
-          <p:cNvSpPr/>
-          <p:nvPr/>
-        </p:nvSpPr>
-        <p:spPr>
-          <a:xfrm>
-            <a:off x="4667250" y="925860"/>
-            <a:ext cx="4095750" cy="1704975"/>
+          <p:cNvPr id="21" name="Text 19"/>
+          <p:cNvSpPr/>
+          <p:nvPr/>
+        </p:nvSpPr>
+        <p:spPr>
+          <a:xfrm>
+            <a:off x="4667250" y="1008013"/>
+            <a:ext cx="4095750" cy="1723430"/>
           </a:xfrm>
           <a:prstGeom prst="roundRect">
             <a:avLst>
-              <a:gd name="adj" fmla="val 2235"/>
+              <a:gd name="adj" fmla="val 2211"/>
             </a:avLst>
           </a:prstGeom>
           <a:solidFill>
@@ -6185,14 +6420,14 @@
       </p:sp>
       <p:sp>
         <p:nvSpPr>
-          <p:cNvPr id="17" name="Shape 15"/>
-          <p:cNvSpPr/>
-          <p:nvPr/>
-        </p:nvSpPr>
-        <p:spPr>
-          <a:xfrm>
-            <a:off x="4686300" y="925860"/>
-            <a:ext cx="0" cy="1704975"/>
+          <p:cNvPr id="22" name="Shape 20"/>
+          <p:cNvSpPr/>
+          <p:nvPr/>
+        </p:nvSpPr>
+        <p:spPr>
+          <a:xfrm>
+            <a:off x="4686300" y="1008013"/>
+            <a:ext cx="0" cy="1723430"/>
           </a:xfrm>
           <a:prstGeom prst="line">
             <a:avLst/>
@@ -6208,14 +6443,14 @@
       </p:sp>
       <p:sp>
         <p:nvSpPr>
-          <p:cNvPr id="18" name="Text 16"/>
-          <p:cNvSpPr/>
-          <p:nvPr/>
-        </p:nvSpPr>
-        <p:spPr>
-          <a:xfrm>
-            <a:off x="4895850" y="1116360"/>
-            <a:ext cx="1884807" cy="190500"/>
+          <p:cNvPr id="23" name="Text 21"/>
+          <p:cNvSpPr/>
+          <p:nvPr/>
+        </p:nvSpPr>
+        <p:spPr>
+          <a:xfrm>
+            <a:off x="4876800" y="1179463"/>
+            <a:ext cx="1904238" cy="190500"/>
           </a:xfrm>
           <a:prstGeom prst="rect">
             <a:avLst/>
@@ -6232,7 +6467,7 @@
                 <a:spcPts val="1500"/>
               </a:lnSpc>
               <a:spcAft>
-                <a:spcPts val="900"/>
+                <a:spcPts val="750"/>
               </a:spcAft>
               <a:buNone/>
             </a:pPr>
@@ -6253,13 +6488,13 @@
       </p:sp>
       <p:sp>
         <p:nvSpPr>
-          <p:cNvPr id="19" name="Text 17"/>
-          <p:cNvSpPr/>
-          <p:nvPr/>
-        </p:nvSpPr>
-        <p:spPr>
-          <a:xfrm>
-            <a:off x="4895850" y="1454497"/>
+          <p:cNvPr id="24" name="Text 22"/>
+          <p:cNvSpPr/>
+          <p:nvPr/>
+        </p:nvSpPr>
+        <p:spPr>
+          <a:xfrm>
+            <a:off x="4876800" y="1513731"/>
             <a:ext cx="76200" cy="76200"/>
           </a:xfrm>
           <a:prstGeom prst="roundRect">
@@ -6285,13 +6520,55 @@
       </p:sp>
       <p:sp>
         <p:nvSpPr>
-          <p:cNvPr id="20" name="Text 18"/>
-          <p:cNvSpPr/>
-          <p:nvPr/>
-        </p:nvSpPr>
-        <p:spPr>
-          <a:xfrm>
-            <a:off x="4895850" y="1673572"/>
+          <p:cNvPr id="25" name="Text 23"/>
+          <p:cNvSpPr/>
+          <p:nvPr/>
+        </p:nvSpPr>
+        <p:spPr>
+          <a:xfrm>
+            <a:off x="5048250" y="1465213"/>
+            <a:ext cx="1329202" cy="173236"/>
+          </a:xfrm>
+          <a:prstGeom prst="rect">
+            <a:avLst/>
+          </a:prstGeom>
+          <a:noFill/>
+          <a:ln/>
+        </p:spPr>
+        <p:txBody>
+          <a:bodyPr wrap="square" lIns="0" tIns="0" rIns="0" bIns="0" rtlCol="0" anchor="t"/>
+          <a:lstStyle/>
+          <a:p>
+            <a:pPr marL="0" indent="0" algn="l">
+              <a:lnSpc>
+                <a:spcPts val="1365"/>
+              </a:lnSpc>
+              <a:buNone/>
+            </a:pPr>
+            <a:r>
+              <a:rPr lang="en-US" sz="975" dirty="0">
+                <a:solidFill>
+                  <a:srgbClr val="1F2937"/>
+                </a:solidFill>
+                <a:latin typeface="Arial" pitchFamily="34" charset="0"/>
+                <a:ea typeface="Arial" pitchFamily="34" charset="-122"/>
+                <a:cs typeface="Arial" pitchFamily="34" charset="-120"/>
+              </a:rPr>
+              <a:t>ISO 26262 (части 1-11)</a:t>
+            </a:r>
+            <a:endParaRPr lang="en-US" sz="975" dirty="0"/>
+          </a:p>
+        </p:txBody>
+      </p:sp>
+      <p:sp>
+        <p:nvSpPr>
+          <p:cNvPr id="26" name="Text 24"/>
+          <p:cNvSpPr/>
+          <p:nvPr/>
+        </p:nvSpPr>
+        <p:spPr>
+          <a:xfrm>
+            <a:off x="4876800" y="1744117"/>
             <a:ext cx="76200" cy="76200"/>
           </a:xfrm>
           <a:prstGeom prst="roundRect">
@@ -6317,13 +6594,55 @@
       </p:sp>
       <p:sp>
         <p:nvSpPr>
-          <p:cNvPr id="21" name="Text 19"/>
-          <p:cNvSpPr/>
-          <p:nvPr/>
-        </p:nvSpPr>
-        <p:spPr>
-          <a:xfrm>
-            <a:off x="4895850" y="1892647"/>
+          <p:cNvPr id="27" name="Text 25"/>
+          <p:cNvSpPr/>
+          <p:nvPr/>
+        </p:nvSpPr>
+        <p:spPr>
+          <a:xfrm>
+            <a:off x="5048250" y="1695599"/>
+            <a:ext cx="1127453" cy="173236"/>
+          </a:xfrm>
+          <a:prstGeom prst="rect">
+            <a:avLst/>
+          </a:prstGeom>
+          <a:noFill/>
+          <a:ln/>
+        </p:spPr>
+        <p:txBody>
+          <a:bodyPr wrap="square" lIns="0" tIns="0" rIns="0" bIns="0" rtlCol="0" anchor="t"/>
+          <a:lstStyle/>
+          <a:p>
+            <a:pPr marL="0" indent="0" algn="l">
+              <a:lnSpc>
+                <a:spcPts val="1365"/>
+              </a:lnSpc>
+              <a:buNone/>
+            </a:pPr>
+            <a:r>
+              <a:rPr lang="en-US" sz="975" dirty="0">
+                <a:solidFill>
+                  <a:srgbClr val="1F2937"/>
+                </a:solidFill>
+                <a:latin typeface="Arial" pitchFamily="34" charset="0"/>
+                <a:ea typeface="Arial" pitchFamily="34" charset="-122"/>
+                <a:cs typeface="Arial" pitchFamily="34" charset="-120"/>
+              </a:rPr>
+              <a:t>HARA методология</a:t>
+            </a:r>
+            <a:endParaRPr lang="en-US" sz="975" dirty="0"/>
+          </a:p>
+        </p:txBody>
+      </p:sp>
+      <p:sp>
+        <p:nvSpPr>
+          <p:cNvPr id="28" name="Text 26"/>
+          <p:cNvSpPr/>
+          <p:nvPr/>
+        </p:nvSpPr>
+        <p:spPr>
+          <a:xfrm>
+            <a:off x="4876800" y="1974503"/>
             <a:ext cx="76200" cy="76200"/>
           </a:xfrm>
           <a:prstGeom prst="roundRect">
@@ -6349,13 +6668,55 @@
       </p:sp>
       <p:sp>
         <p:nvSpPr>
-          <p:cNvPr id="22" name="Text 20"/>
-          <p:cNvSpPr/>
-          <p:nvPr/>
-        </p:nvSpPr>
-        <p:spPr>
-          <a:xfrm>
-            <a:off x="4895850" y="2111722"/>
+          <p:cNvPr id="29" name="Text 27"/>
+          <p:cNvSpPr/>
+          <p:nvPr/>
+        </p:nvSpPr>
+        <p:spPr>
+          <a:xfrm>
+            <a:off x="5048250" y="1925985"/>
+            <a:ext cx="1050640" cy="173236"/>
+          </a:xfrm>
+          <a:prstGeom prst="rect">
+            <a:avLst/>
+          </a:prstGeom>
+          <a:noFill/>
+          <a:ln/>
+        </p:spPr>
+        <p:txBody>
+          <a:bodyPr wrap="square" lIns="0" tIns="0" rIns="0" bIns="0" rtlCol="0" anchor="t"/>
+          <a:lstStyle/>
+          <a:p>
+            <a:pPr marL="0" indent="0" algn="l">
+              <a:lnSpc>
+                <a:spcPts val="1365"/>
+              </a:lnSpc>
+              <a:buNone/>
+            </a:pPr>
+            <a:r>
+              <a:rPr lang="en-US" sz="975" dirty="0">
+                <a:solidFill>
+                  <a:srgbClr val="1F2937"/>
+                </a:solidFill>
+                <a:latin typeface="Arial" pitchFamily="34" charset="0"/>
+                <a:ea typeface="Arial" pitchFamily="34" charset="-122"/>
+                <a:cs typeface="Arial" pitchFamily="34" charset="-120"/>
+              </a:rPr>
+              <a:t>ASIL уровни (A-D)</a:t>
+            </a:r>
+            <a:endParaRPr lang="en-US" sz="975" dirty="0"/>
+          </a:p>
+        </p:txBody>
+      </p:sp>
+      <p:sp>
+        <p:nvSpPr>
+          <p:cNvPr id="30" name="Text 28"/>
+          <p:cNvSpPr/>
+          <p:nvPr/>
+        </p:nvSpPr>
+        <p:spPr>
+          <a:xfrm>
+            <a:off x="4876800" y="2204889"/>
             <a:ext cx="76200" cy="76200"/>
           </a:xfrm>
           <a:prstGeom prst="roundRect">
@@ -6381,13 +6742,55 @@
       </p:sp>
       <p:sp>
         <p:nvSpPr>
-          <p:cNvPr id="23" name="Text 21"/>
-          <p:cNvSpPr/>
-          <p:nvPr/>
-        </p:nvSpPr>
-        <p:spPr>
-          <a:xfrm>
-            <a:off x="4895850" y="2330797"/>
+          <p:cNvPr id="31" name="Text 29"/>
+          <p:cNvSpPr/>
+          <p:nvPr/>
+        </p:nvSpPr>
+        <p:spPr>
+          <a:xfrm>
+            <a:off x="5048250" y="2156371"/>
+            <a:ext cx="1159484" cy="173236"/>
+          </a:xfrm>
+          <a:prstGeom prst="rect">
+            <a:avLst/>
+          </a:prstGeom>
+          <a:noFill/>
+          <a:ln/>
+        </p:spPr>
+        <p:txBody>
+          <a:bodyPr wrap="square" lIns="0" tIns="0" rIns="0" bIns="0" rtlCol="0" anchor="t"/>
+          <a:lstStyle/>
+          <a:p>
+            <a:pPr marL="0" indent="0" algn="l">
+              <a:lnSpc>
+                <a:spcPts val="1365"/>
+              </a:lnSpc>
+              <a:buNone/>
+            </a:pPr>
+            <a:r>
+              <a:rPr lang="en-US" sz="975" dirty="0">
+                <a:solidFill>
+                  <a:srgbClr val="1F2937"/>
+                </a:solidFill>
+                <a:latin typeface="Arial" pitchFamily="34" charset="0"/>
+                <a:ea typeface="Arial" pitchFamily="34" charset="-122"/>
+                <a:cs typeface="Arial" pitchFamily="34" charset="-120"/>
+              </a:rPr>
+              <a:t>V-Model разработки</a:t>
+            </a:r>
+            <a:endParaRPr lang="en-US" sz="975" dirty="0"/>
+          </a:p>
+        </p:txBody>
+      </p:sp>
+      <p:sp>
+        <p:nvSpPr>
+          <p:cNvPr id="32" name="Text 30"/>
+          <p:cNvSpPr/>
+          <p:nvPr/>
+        </p:nvSpPr>
+        <p:spPr>
+          <a:xfrm>
+            <a:off x="4876800" y="2435275"/>
             <a:ext cx="76200" cy="76200"/>
           </a:xfrm>
           <a:prstGeom prst="roundRect">
@@ -6411,9 +6814,51 @@
           </a:p>
         </p:txBody>
       </p:sp>
+      <p:sp>
+        <p:nvSpPr>
+          <p:cNvPr id="33" name="Text 31"/>
+          <p:cNvSpPr/>
+          <p:nvPr/>
+        </p:nvSpPr>
+        <p:spPr>
+          <a:xfrm>
+            <a:off x="5048250" y="2386757"/>
+            <a:ext cx="1311744" cy="173236"/>
+          </a:xfrm>
+          <a:prstGeom prst="rect">
+            <a:avLst/>
+          </a:prstGeom>
+          <a:noFill/>
+          <a:ln/>
+        </p:spPr>
+        <p:txBody>
+          <a:bodyPr wrap="square" lIns="0" tIns="0" rIns="0" bIns="0" rtlCol="0" anchor="t"/>
+          <a:lstStyle/>
+          <a:p>
+            <a:pPr marL="0" indent="0" algn="l">
+              <a:lnSpc>
+                <a:spcPts val="1365"/>
+              </a:lnSpc>
+              <a:buNone/>
+            </a:pPr>
+            <a:r>
+              <a:rPr lang="en-US" sz="975" dirty="0">
+                <a:solidFill>
+                  <a:srgbClr val="1F2937"/>
+                </a:solidFill>
+                <a:latin typeface="Arial" pitchFamily="34" charset="0"/>
+                <a:ea typeface="Arial" pitchFamily="34" charset="-122"/>
+                <a:cs typeface="Arial" pitchFamily="34" charset="-120"/>
+              </a:rPr>
+              <a:t>ГОСТ Р стандарты РФ</a:t>
+            </a:r>
+            <a:endParaRPr lang="en-US" sz="975" dirty="0"/>
+          </a:p>
+        </p:txBody>
+      </p:sp>
       <p:pic>
         <p:nvPicPr>
-          <p:cNvPr id="24" name="Image 0" descr="/tmp/rasterized-gradient-f7163369.png"/>
+          <p:cNvPr id="34" name="Image 0" descr="/tmp/rasterized-gradient-9b80656d.png"/>
           <p:cNvPicPr>
             <a:picLocks noChangeAspect="1"/>
           </p:cNvPicPr>
@@ -6427,8 +6872,8 @@
         </p:blipFill>
         <p:spPr>
           <a:xfrm>
-            <a:off x="4667250" y="2783235"/>
-            <a:ext cx="4095750" cy="1386780"/>
+            <a:off x="4667250" y="2864793"/>
+            <a:ext cx="4095750" cy="1282005"/>
           </a:xfrm>
           <a:prstGeom prst="rect">
             <a:avLst/>
@@ -6437,14 +6882,14 @@
       </p:pic>
       <p:sp>
         <p:nvSpPr>
-          <p:cNvPr id="25" name="Text 22"/>
-          <p:cNvSpPr/>
-          <p:nvPr/>
-        </p:nvSpPr>
-        <p:spPr>
-          <a:xfrm>
-            <a:off x="4857750" y="2973735"/>
-            <a:ext cx="1904238" cy="190500"/>
+          <p:cNvPr id="35" name="Text 32"/>
+          <p:cNvSpPr/>
+          <p:nvPr/>
+        </p:nvSpPr>
+        <p:spPr>
+          <a:xfrm>
+            <a:off x="4838700" y="3036243"/>
+            <a:ext cx="1923669" cy="190500"/>
           </a:xfrm>
           <a:prstGeom prst="rect">
             <a:avLst/>
@@ -6461,7 +6906,7 @@
                 <a:spcPts val="1500"/>
               </a:lnSpc>
               <a:spcAft>
-                <a:spcPts val="900"/>
+                <a:spcPts val="750"/>
               </a:spcAft>
               <a:buNone/>
             </a:pPr>
@@ -6482,18 +6927,18 @@
       </p:sp>
       <p:sp>
         <p:nvSpPr>
-          <p:cNvPr id="26" name="Text 23"/>
-          <p:cNvSpPr/>
-          <p:nvPr/>
-        </p:nvSpPr>
-        <p:spPr>
-          <a:xfrm>
-            <a:off x="4857750" y="3278535"/>
-            <a:ext cx="1819275" cy="312390"/>
+          <p:cNvPr id="36" name="Text 33"/>
+          <p:cNvSpPr/>
+          <p:nvPr/>
+        </p:nvSpPr>
+        <p:spPr>
+          <a:xfrm>
+            <a:off x="4838700" y="3321993"/>
+            <a:ext cx="1843088" cy="293340"/>
           </a:xfrm>
           <a:prstGeom prst="roundRect">
             <a:avLst>
-              <a:gd name="adj" fmla="val 9147"/>
+              <a:gd name="adj" fmla="val 9741"/>
             </a:avLst>
           </a:prstGeom>
           <a:solidFill>
@@ -6516,14 +6961,14 @@
       </p:sp>
       <p:sp>
         <p:nvSpPr>
-          <p:cNvPr id="27" name="Text 24"/>
-          <p:cNvSpPr/>
-          <p:nvPr/>
-        </p:nvSpPr>
-        <p:spPr>
-          <a:xfrm>
-            <a:off x="4953000" y="3354735"/>
-            <a:ext cx="1661351" cy="159990"/>
+          <p:cNvPr id="37" name="Text 34"/>
+          <p:cNvSpPr/>
+          <p:nvPr/>
+        </p:nvSpPr>
+        <p:spPr>
+          <a:xfrm>
+            <a:off x="4924425" y="3388668"/>
+            <a:ext cx="1705070" cy="159990"/>
           </a:xfrm>
           <a:prstGeom prst="rect">
             <a:avLst/>
@@ -6558,18 +7003,18 @@
       </p:sp>
       <p:sp>
         <p:nvSpPr>
-          <p:cNvPr id="28" name="Text 25"/>
-          <p:cNvSpPr/>
-          <p:nvPr/>
-        </p:nvSpPr>
-        <p:spPr>
-          <a:xfrm>
-            <a:off x="6753225" y="3278535"/>
-            <a:ext cx="1819275" cy="312390"/>
+          <p:cNvPr id="38" name="Text 35"/>
+          <p:cNvSpPr/>
+          <p:nvPr/>
+        </p:nvSpPr>
+        <p:spPr>
+          <a:xfrm>
+            <a:off x="6748463" y="3321993"/>
+            <a:ext cx="1843088" cy="293340"/>
           </a:xfrm>
           <a:prstGeom prst="roundRect">
             <a:avLst>
-              <a:gd name="adj" fmla="val 9147"/>
+              <a:gd name="adj" fmla="val 9741"/>
             </a:avLst>
           </a:prstGeom>
           <a:solidFill>
@@ -6592,14 +7037,14 @@
       </p:sp>
       <p:sp>
         <p:nvSpPr>
-          <p:cNvPr id="29" name="Text 26"/>
-          <p:cNvSpPr/>
-          <p:nvPr/>
-        </p:nvSpPr>
-        <p:spPr>
-          <a:xfrm>
-            <a:off x="6848475" y="3354735"/>
-            <a:ext cx="1661351" cy="159990"/>
+          <p:cNvPr id="39" name="Text 36"/>
+          <p:cNvSpPr/>
+          <p:nvPr/>
+        </p:nvSpPr>
+        <p:spPr>
+          <a:xfrm>
+            <a:off x="6834188" y="3388668"/>
+            <a:ext cx="1705070" cy="159990"/>
           </a:xfrm>
           <a:prstGeom prst="rect">
             <a:avLst/>
@@ -6634,18 +7079,18 @@
       </p:sp>
       <p:sp>
         <p:nvSpPr>
-          <p:cNvPr id="30" name="Text 27"/>
-          <p:cNvSpPr/>
-          <p:nvPr/>
-        </p:nvSpPr>
-        <p:spPr>
-          <a:xfrm>
-            <a:off x="4857750" y="3667125"/>
-            <a:ext cx="1819275" cy="312390"/>
+          <p:cNvPr id="40" name="Text 37"/>
+          <p:cNvSpPr/>
+          <p:nvPr/>
+        </p:nvSpPr>
+        <p:spPr>
+          <a:xfrm>
+            <a:off x="4838700" y="3682008"/>
+            <a:ext cx="1843088" cy="293340"/>
           </a:xfrm>
           <a:prstGeom prst="roundRect">
             <a:avLst>
-              <a:gd name="adj" fmla="val 9147"/>
+              <a:gd name="adj" fmla="val 9741"/>
             </a:avLst>
           </a:prstGeom>
           <a:solidFill>
@@ -6668,14 +7113,14 @@
       </p:sp>
       <p:sp>
         <p:nvSpPr>
-          <p:cNvPr id="31" name="Text 28"/>
-          <p:cNvSpPr/>
-          <p:nvPr/>
-        </p:nvSpPr>
-        <p:spPr>
-          <a:xfrm>
-            <a:off x="4953000" y="3743325"/>
-            <a:ext cx="1661351" cy="159990"/>
+          <p:cNvPr id="41" name="Text 38"/>
+          <p:cNvSpPr/>
+          <p:nvPr/>
+        </p:nvSpPr>
+        <p:spPr>
+          <a:xfrm>
+            <a:off x="4924425" y="3748683"/>
+            <a:ext cx="1705070" cy="159990"/>
           </a:xfrm>
           <a:prstGeom prst="rect">
             <a:avLst/>
@@ -6710,18 +7155,18 @@
       </p:sp>
       <p:sp>
         <p:nvSpPr>
-          <p:cNvPr id="32" name="Text 29"/>
-          <p:cNvSpPr/>
-          <p:nvPr/>
-        </p:nvSpPr>
-        <p:spPr>
-          <a:xfrm>
-            <a:off x="6753225" y="3667125"/>
-            <a:ext cx="1819275" cy="312390"/>
+          <p:cNvPr id="42" name="Text 39"/>
+          <p:cNvSpPr/>
+          <p:nvPr/>
+        </p:nvSpPr>
+        <p:spPr>
+          <a:xfrm>
+            <a:off x="6748463" y="3682008"/>
+            <a:ext cx="1843088" cy="293340"/>
           </a:xfrm>
           <a:prstGeom prst="roundRect">
             <a:avLst>
-              <a:gd name="adj" fmla="val 9147"/>
+              <a:gd name="adj" fmla="val 9741"/>
             </a:avLst>
           </a:prstGeom>
           <a:solidFill>
@@ -6744,14 +7189,14 @@
       </p:sp>
       <p:sp>
         <p:nvSpPr>
-          <p:cNvPr id="33" name="Text 30"/>
-          <p:cNvSpPr/>
-          <p:nvPr/>
-        </p:nvSpPr>
-        <p:spPr>
-          <a:xfrm>
-            <a:off x="6848475" y="3743325"/>
-            <a:ext cx="1661351" cy="159990"/>
+          <p:cNvPr id="43" name="Text 40"/>
+          <p:cNvSpPr/>
+          <p:nvPr/>
+        </p:nvSpPr>
+        <p:spPr>
+          <a:xfrm>
+            <a:off x="6834188" y="3748683"/>
+            <a:ext cx="1705070" cy="159990"/>
           </a:xfrm>
           <a:prstGeom prst="rect">
             <a:avLst/>
@@ -6786,18 +7231,18 @@
       </p:sp>
       <p:sp>
         <p:nvSpPr>
-          <p:cNvPr id="34" name="Text 31"/>
-          <p:cNvSpPr/>
-          <p:nvPr/>
-        </p:nvSpPr>
-        <p:spPr>
-          <a:xfrm>
-            <a:off x="4667250" y="4322415"/>
-            <a:ext cx="4095750" cy="800100"/>
+          <p:cNvPr id="44" name="Text 41"/>
+          <p:cNvSpPr/>
+          <p:nvPr/>
+        </p:nvSpPr>
+        <p:spPr>
+          <a:xfrm>
+            <a:off x="4667250" y="4280148"/>
+            <a:ext cx="4095750" cy="760065"/>
           </a:xfrm>
           <a:prstGeom prst="roundRect">
             <a:avLst>
-              <a:gd name="adj" fmla="val 4762"/>
+              <a:gd name="adj" fmla="val 5013"/>
             </a:avLst>
           </a:prstGeom>
           <a:solidFill>
@@ -6818,14 +7263,14 @@
       </p:sp>
       <p:sp>
         <p:nvSpPr>
-          <p:cNvPr id="35" name="Shape 32"/>
-          <p:cNvSpPr/>
-          <p:nvPr/>
-        </p:nvSpPr>
-        <p:spPr>
-          <a:xfrm>
-            <a:off x="4686300" y="4322415"/>
-            <a:ext cx="0" cy="800100"/>
+          <p:cNvPr id="45" name="Shape 42"/>
+          <p:cNvSpPr/>
+          <p:nvPr/>
+        </p:nvSpPr>
+        <p:spPr>
+          <a:xfrm>
+            <a:off x="4686300" y="4280148"/>
+            <a:ext cx="0" cy="760065"/>
           </a:xfrm>
           <a:prstGeom prst="line">
             <a:avLst/>
@@ -6841,14 +7286,14 @@
       </p:sp>
       <p:sp>
         <p:nvSpPr>
-          <p:cNvPr id="36" name="Text 33"/>
-          <p:cNvSpPr/>
-          <p:nvPr/>
-        </p:nvSpPr>
-        <p:spPr>
-          <a:xfrm>
-            <a:off x="4857750" y="4474815"/>
-            <a:ext cx="3827907" cy="171450"/>
+          <p:cNvPr id="46" name="Text 43"/>
+          <p:cNvSpPr/>
+          <p:nvPr/>
+        </p:nvSpPr>
+        <p:spPr>
+          <a:xfrm>
+            <a:off x="4838700" y="4413498"/>
+            <a:ext cx="3866769" cy="171450"/>
           </a:xfrm>
           <a:prstGeom prst="rect">
             <a:avLst/>
@@ -6865,7 +7310,7 @@
                 <a:spcPts val="1350"/>
               </a:lnSpc>
               <a:spcAft>
-                <a:spcPts val="600"/>
+                <a:spcPts val="525"/>
               </a:spcAft>
               <a:buNone/>
             </a:pPr>
@@ -6881,6 +7326,154 @@
               <a:t>Языки</a:t>
             </a:r>
             <a:endParaRPr lang="en-US" sz="1125" dirty="0"/>
+          </a:p>
+        </p:txBody>
+      </p:sp>
+      <p:sp>
+        <p:nvSpPr>
+          <p:cNvPr id="47" name="Text 44"/>
+          <p:cNvSpPr/>
+          <p:nvPr/>
+        </p:nvSpPr>
+        <p:spPr>
+          <a:xfrm>
+            <a:off x="4838700" y="4651623"/>
+            <a:ext cx="1161008" cy="255240"/>
+          </a:xfrm>
+          <a:prstGeom prst="roundRect">
+            <a:avLst>
+              <a:gd name="adj" fmla="val 11195"/>
+            </a:avLst>
+          </a:prstGeom>
+          <a:solidFill>
+            <a:srgbClr val="FFFFFF"/>
+          </a:solidFill>
+          <a:ln/>
+        </p:spPr>
+        <p:txBody>
+          <a:bodyPr wrap="square" rtlCol="0" anchor="ctr"/>
+          <a:lstStyle/>
+          <a:p>
+            <a:pPr marL="0" indent="0">
+              <a:buNone/>
+            </a:pPr>
+            <a:endParaRPr lang="en-US" dirty="0"/>
+          </a:p>
+        </p:txBody>
+      </p:sp>
+      <p:sp>
+        <p:nvSpPr>
+          <p:cNvPr id="48" name="Text 45"/>
+          <p:cNvSpPr/>
+          <p:nvPr/>
+        </p:nvSpPr>
+        <p:spPr>
+          <a:xfrm>
+            <a:off x="4924425" y="4699248"/>
+            <a:ext cx="1009349" cy="159990"/>
+          </a:xfrm>
+          <a:prstGeom prst="rect">
+            <a:avLst/>
+          </a:prstGeom>
+          <a:noFill/>
+          <a:ln/>
+        </p:spPr>
+        <p:txBody>
+          <a:bodyPr wrap="square" lIns="0" tIns="0" rIns="0" bIns="0" rtlCol="0" anchor="t"/>
+          <a:lstStyle/>
+          <a:p>
+            <a:pPr marL="0" indent="0" algn="l">
+              <a:lnSpc>
+                <a:spcPts val="1260"/>
+              </a:lnSpc>
+              <a:buNone/>
+            </a:pPr>
+            <a:r>
+              <a:rPr lang="en-US" sz="900" b="1" dirty="0">
+                <a:solidFill>
+                  <a:srgbClr val="1E40AF"/>
+                </a:solidFill>
+                <a:latin typeface="Arial" pitchFamily="34" charset="0"/>
+                <a:ea typeface="Arial" pitchFamily="34" charset="-122"/>
+                <a:cs typeface="Arial" pitchFamily="34" charset="-120"/>
+              </a:rPr>
+              <a:t>Русский (родной)</a:t>
+            </a:r>
+            <a:endParaRPr lang="en-US" sz="900" dirty="0"/>
+          </a:p>
+        </p:txBody>
+      </p:sp>
+      <p:sp>
+        <p:nvSpPr>
+          <p:cNvPr id="49" name="Text 46"/>
+          <p:cNvSpPr/>
+          <p:nvPr/>
+        </p:nvSpPr>
+        <p:spPr>
+          <a:xfrm>
+            <a:off x="6066383" y="4651623"/>
+            <a:ext cx="1210866" cy="255240"/>
+          </a:xfrm>
+          <a:prstGeom prst="roundRect">
+            <a:avLst>
+              <a:gd name="adj" fmla="val 11195"/>
+            </a:avLst>
+          </a:prstGeom>
+          <a:solidFill>
+            <a:srgbClr val="FFFFFF"/>
+          </a:solidFill>
+          <a:ln/>
+        </p:spPr>
+        <p:txBody>
+          <a:bodyPr wrap="square" rtlCol="0" anchor="ctr"/>
+          <a:lstStyle/>
+          <a:p>
+            <a:pPr marL="0" indent="0">
+              <a:buNone/>
+            </a:pPr>
+            <a:endParaRPr lang="en-US" dirty="0"/>
+          </a:p>
+        </p:txBody>
+      </p:sp>
+      <p:sp>
+        <p:nvSpPr>
+          <p:cNvPr id="50" name="Text 47"/>
+          <p:cNvSpPr/>
+          <p:nvPr/>
+        </p:nvSpPr>
+        <p:spPr>
+          <a:xfrm>
+            <a:off x="6152108" y="4699248"/>
+            <a:ext cx="1060204" cy="159990"/>
+          </a:xfrm>
+          <a:prstGeom prst="rect">
+            <a:avLst/>
+          </a:prstGeom>
+          <a:noFill/>
+          <a:ln/>
+        </p:spPr>
+        <p:txBody>
+          <a:bodyPr wrap="square" lIns="0" tIns="0" rIns="0" bIns="0" rtlCol="0" anchor="t"/>
+          <a:lstStyle/>
+          <a:p>
+            <a:pPr marL="0" indent="0" algn="l">
+              <a:lnSpc>
+                <a:spcPts val="1260"/>
+              </a:lnSpc>
+              <a:buNone/>
+            </a:pPr>
+            <a:r>
+              <a:rPr lang="en-US" sz="900" b="1" dirty="0">
+                <a:solidFill>
+                  <a:srgbClr val="1E40AF"/>
+                </a:solidFill>
+                <a:latin typeface="Arial" pitchFamily="34" charset="0"/>
+                <a:ea typeface="Arial" pitchFamily="34" charset="-122"/>
+                <a:cs typeface="Arial" pitchFamily="34" charset="-120"/>
+              </a:rPr>
+              <a:t>English (Technical)</a:t>
+            </a:r>
+            <a:endParaRPr lang="en-US" sz="900" dirty="0"/>
           </a:p>
         </p:txBody>
       </p:sp>
@@ -6991,7 +7584,7 @@
       </p:sp>
       <p:pic>
         <p:nvPicPr>
-          <p:cNvPr id="4" name="Image 0" descr="/tmp/rasterized-gradient-ddf2f055.png"/>
+          <p:cNvPr id="4" name="Image 0" descr="/tmp/rasterized-gradient-2def652a.png"/>
           <p:cNvPicPr>
             <a:picLocks noChangeAspect="1"/>
           </p:cNvPicPr>
